--- a/classes/parte-6-analisis-de-malware/150-ransomware-anatomia-y-analisis/clase-150-presentacion.pptx
+++ b/classes/parte-6-analisis-de-malware/150-ransomware-anatomia-y-analisis/clase-150-presentacion.pptx
@@ -20,6 +20,7 @@
     <p:sldId id="268" r:id="rId19"/>
     <p:sldId id="269" r:id="rId20"/>
     <p:sldId id="270" r:id="rId21"/>
+    <p:sldId id="271" r:id="rId22"/>
   </p:sldIdLst>
   <p:sldSz cx="9144000" cy="6858000" type="screen4x3"/>
   <p:notesSz cx="6858000" cy="9144000"/>
@@ -3823,6 +3824,21 @@
               <a:t>•  MITRE ATT&amp;CK — Data Encrypted for Impact (T1486). &lt;https://attack.mitre.org/techniques/T1486/&gt;</a:t>
             </a:r>
           </a:p>
+          <a:p>
+            <a:pPr>
+              <a:spcAft>
+                <a:spcPts val="600"/>
+              </a:spcAft>
+            </a:pPr>
+            <a:r>
+              <a:rPr sz="1500">
+                <a:solidFill>
+                  <a:srgbClr val="22282E"/>
+                </a:solidFill>
+              </a:rPr>
+              <a:t>•  Europol — Internet Organised Crime Threat Assessment. &lt;https://www.europol.europa.eu/publications-events/main-reports/internet-organised-crime-threat-assessment&gt;</a:t>
+            </a:r>
+          </a:p>
         </p:txBody>
       </p:sp>
     </p:spTree>
@@ -3871,7 +3887,82 @@
                   <a:srgbClr val="0B3D2E"/>
                 </a:solidFill>
               </a:rPr>
-              <a:t>Diagrama de la clase</a:t>
+              <a:t>Diagrama 1</a:t>
+            </a:r>
+          </a:p>
+        </p:txBody>
+      </p:sp>
+      <p:pic>
+        <p:nvPicPr>
+          <p:cNvPr id="3" name="Picture 2" descr="754b6da0045b7461.png"/>
+          <p:cNvPicPr>
+            <a:picLocks noChangeAspect="1"/>
+          </p:cNvPicPr>
+          <p:nvPr/>
+        </p:nvPicPr>
+        <p:blipFill>
+          <a:blip r:embed="rId2"/>
+          <a:stretch>
+            <a:fillRect/>
+          </a:stretch>
+        </p:blipFill>
+        <p:spPr>
+          <a:xfrm>
+            <a:off x="457200" y="2496312"/>
+            <a:ext cx="8229600" cy="2505456"/>
+          </a:xfrm>
+          <a:prstGeom prst="rect">
+            <a:avLst/>
+          </a:prstGeom>
+        </p:spPr>
+      </p:pic>
+    </p:spTree>
+  </p:cSld>
+  <p:clrMapOvr>
+    <a:masterClrMapping/>
+  </p:clrMapOvr>
+</p:sld>
+</file>
+
+<file path=ppt/slides/slide16.xml><?xml version="1.0" encoding="utf-8"?>
+<p:sld xmlns:a="http://schemas.openxmlformats.org/drawingml/2006/main" xmlns:p="http://schemas.openxmlformats.org/presentationml/2006/main" xmlns:r="http://schemas.openxmlformats.org/officeDocument/2006/relationships">
+  <p:cSld>
+    <p:spTree>
+      <p:nvGrpSpPr>
+        <p:cNvPr id="1" name=""/>
+        <p:cNvGrpSpPr/>
+        <p:nvPr/>
+      </p:nvGrpSpPr>
+      <p:grpSpPr/>
+      <p:sp>
+        <p:nvSpPr>
+          <p:cNvPr id="2" name="TextBox 1"/>
+          <p:cNvSpPr txBox="1"/>
+          <p:nvPr/>
+        </p:nvSpPr>
+        <p:spPr>
+          <a:xfrm>
+            <a:off x="457200" y="274320"/>
+            <a:ext cx="8229600" cy="640080"/>
+          </a:xfrm>
+          <a:prstGeom prst="rect">
+            <a:avLst/>
+          </a:prstGeom>
+          <a:noFill/>
+        </p:spPr>
+        <p:txBody>
+          <a:bodyPr wrap="square">
+            <a:spAutoFit/>
+          </a:bodyPr>
+          <a:lstStyle/>
+          <a:p>
+            <a:r>
+              <a:rPr sz="2200" b="1">
+                <a:solidFill>
+                  <a:srgbClr val="0B3D2E"/>
+                </a:solidFill>
+              </a:rPr>
+              <a:t>Diagrama 2</a:t>
             </a:r>
           </a:p>
         </p:txBody>
@@ -4789,52 +4880,52 @@
                   <a:srgbClr val="22282E"/>
                 </a:solidFill>
               </a:rPr>
+              <a:t>•  CaaS — Mercado de capacidades criminales especializadas; aquí, Cybercrime-as-a-Service</a:t>
+            </a:r>
+          </a:p>
+          <a:p>
+            <a:pPr>
+              <a:spcAft>
+                <a:spcPts val="600"/>
+              </a:spcAft>
+            </a:pPr>
+            <a:r>
+              <a:rPr sz="1500">
+                <a:solidFill>
+                  <a:srgbClr val="22282E"/>
+                </a:solidFill>
+              </a:rPr>
+              <a:t>•  Initial access broker — Intermediario que transfiere acceso obtenido a otro actor</a:t>
+            </a:r>
+          </a:p>
+          <a:p>
+            <a:pPr>
+              <a:spcAft>
+                <a:spcPts val="600"/>
+              </a:spcAft>
+            </a:pPr>
+            <a:r>
+              <a:rPr sz="1500">
+                <a:solidFill>
+                  <a:srgbClr val="22282E"/>
+                </a:solidFill>
+              </a:rPr>
+              <a:t>•  DDoS-for-hire — Capacidad de denegación ofrecida a clientes; no prueba quién la contrató</a:t>
+            </a:r>
+          </a:p>
+          <a:p>
+            <a:pPr>
+              <a:spcAft>
+                <a:spcPts val="600"/>
+              </a:spcAft>
+            </a:pPr>
+            <a:r>
+              <a:rPr sz="1500">
+                <a:solidFill>
+                  <a:srgbClr val="22282E"/>
+                </a:solidFill>
+              </a:rPr>
               <a:t>•  Afiliado — Quien despliega el ransomware a cambio de un porcentaje</a:t>
-            </a:r>
-          </a:p>
-          <a:p>
-            <a:pPr>
-              <a:spcAft>
-                <a:spcPts val="600"/>
-              </a:spcAft>
-            </a:pPr>
-            <a:r>
-              <a:rPr sz="1500">
-                <a:solidFill>
-                  <a:srgbClr val="22282E"/>
-                </a:solidFill>
-              </a:rPr>
-              <a:t>•  Cadena de ataque — Acceso, lateral, exfiltración y cifrado final</a:t>
-            </a:r>
-          </a:p>
-          <a:p>
-            <a:pPr>
-              <a:spcAft>
-                <a:spcPts val="600"/>
-              </a:spcAft>
-            </a:pPr>
-            <a:r>
-              <a:rPr sz="1500">
-                <a:solidFill>
-                  <a:srgbClr val="22282E"/>
-                </a:solidFill>
-              </a:rPr>
-              <a:t>•  Esquema híbrido — AES por fichero + RSA para la clave AES</a:t>
-            </a:r>
-          </a:p>
-          <a:p>
-            <a:pPr>
-              <a:spcAft>
-                <a:spcPts val="600"/>
-              </a:spcAft>
-            </a:pPr>
-            <a:r>
-              <a:rPr sz="1500">
-                <a:solidFill>
-                  <a:srgbClr val="22282E"/>
-                </a:solidFill>
-              </a:rPr>
-              <a:t>•  Clave privada RSA — La tiene solo el atacante; hace irreversible el cifrado</a:t>
             </a:r>
           </a:p>
         </p:txBody>
